--- a/output/deliverables/board_report.pptx
+++ b/output/deliverables/board_report.pptx
@@ -4060,7 +4060,7 @@
                   <a:srgbClr val="1E293B"/>
                 </a:solidFill>
               </a:rPr>
-              <a:t>CURRENT-CYCLE HEADLINE: All five operating regions have escalated simultaneously to System intrusion as their primary scenario — a complete global convergence unprecedented in this pipeline's history — reflecting a structural threat environment in which state-sponsored actors are targeting wind turbine IP, manufacturing operational technology, and service delivery infrastructure across every geography in which AeroGrid operates, with combined quantified exposure of $44.7 million USD concentrated in AME and APAC. CROSS-REGIONAL PATTERN: System intrusion is the primary scenario in all five regions, driven in four of five cases by the Geopolitical pillar — state-directed pressure on clean energy supply chains and wind technology acquisition is the single unifying driver globally; all five escalations carry a B2 Admiralty rating, meaning the board is working with a uniformly corroborated confidence level, though three of the five assessments rest on inferred rather than confirmed cyber indicators: AME and LATAM have no confirmed cyber indicators and the adversary mechanism is inferred from geopolitical conditions and sector precedent, while NCE has no publicly attributed incident against wind OT environments in the current collection window. VELOCITY/HISTORICAL CONTEXT: Global risk is not stable — LATAM and NCE are both assessed as accelerating, with LATAM completing its first confirmed full-escalation trajectory after eight consecutive clear or monitor assessments; APAC has returned System intrusion as its primary scenario for 12 consecutive runs, representing sustained structural exposure rooted in China's state-backed wind technology programme rather than cyclical variance; LATAM has returned System intrusion for 4 consecutive runs and MED for 3 consecutive runs, both indicating that the geopolitical supply chain pressure driving those assessments is hardening into a persistent condition. CORRECTIONS/CAVEATS: The NCE primary scenario reflects an analyst override of the automated classification, which returned System failure; the override is analytically grounded in confirmed state-actor intrusion tradecraft against adjacent manufacturing sectors but represents analyst judgment rather than a direct indicator match against wind OT environments; NCE and LATAM both carry a VaCR of zero, reflecting the absence of assigned quantified exposure in the CRQ register rather than the absence of operational risk.</a:t>
+              <a:t>CURRENT-CYCLE HEADLINE: All five operating regions have escalated simultaneously — a global first in this pipeline's run history — with state-sponsored pressure targeting wind turbine IP, manufacturing OT environments, and supply chain access points across every geography in which AeroGrid holds assets; AME carries the highest single-region financial exposure under a Ransomware scenario, while APAC, LATAM, MED, and NCE converge on System intrusion, collectively placing the full scope of AeroGrid's crown jewels under active geopolitical threat. CROSS-REGIONAL PATTERN: System intrusion against wind turbine IP and OT networks is the dominant global scenario across four of five escalated regions, driven in each case by the Geopolitical pillar — state-directed competition over clean energy technology is the single unifying driver; AME diverges with a Ransomware primary scenario at financial rank 1, but shares the same underlying geopolitical driver of supply chain coercion; all five escalations carry B2 Admiralty ratings with the exception of LATAM, whose Admiralty confidence is partially impaired by a confirmed cyber collection gap — the board should treat LATAM's escalation as geopolitically grounded but cyber-layer inferred, distinguishing it from the B2-confirmed assessments in APAC, MED, and NCE where dual-pillar corroboration is available. VELOCITY/HISTORICAL CONTEXT: Two regions are accelerating (LATAM, NCE), three are stable (APAC, AME, MED); APAC has returned System intrusion as its primary scenario for 12 consecutive runs, representing sustained structural exposure rather than cyclical variance; LATAM has returned System intrusion for 4 consecutive runs following an escalation step-change from a clear baseline sustained through early March 2026; MED has returned System intrusion for 3 consecutive runs, indicating a durable rather than transient alignment with current maritime disruption and OT pre-positioning conditions. CORRECTIONS/CAVEATS: The AME data classification is Ransomware at financial rank 1, but the current AME regional brief addresses System intrusion tradecraft — this discrepancy should be reviewed before the next AME cycle; the NCE primary scenario reflects an analyst override of the automated System failure classification, grounded in confirmed state-actor manufacturing sector tradecraft but not a direct indicator match against wind OT environments; LATAM and NCE carry VaCR of zero in the current risk register, reflecting the absence of quantified exposure assignments rather than the absence of operational risk.</a:t>
             </a:r>
           </a:p>
         </p:txBody>
